--- a/skills/bda-weekly-deliverables/assets/session-template-apple-style.pptx
+++ b/skills/bda-weekly-deliverables/assets/session-template-apple-style.pptx
@@ -4285,7 +4285,7 @@
     <p:bg>
       <p:bgPr>
         <a:solidFill>
-          <a:srgbClr val="0B0B0C"/>
+          <a:srgbClr val="FFFFFF"/>
         </a:solidFill>
         <a:effectLst/>
       </p:bgPr>
@@ -4347,7 +4347,7 @@
               </a:spcAft>
               <a:defRPr sz="6400" b="1" i="0">
                 <a:solidFill>
-                  <a:srgbClr val="F5F5F7"/>
+                  <a:srgbClr val="000000"/>
                 </a:solidFill>
                 <a:latin typeface="Helvetica Neue"/>
               </a:defRPr>
@@ -4366,7 +4366,7 @@
               </a:spcAft>
               <a:defRPr sz="2600" b="0" i="0">
                 <a:solidFill>
-                  <a:srgbClr val="A1A1A6"/>
+                  <a:srgbClr val="6E6E73"/>
                 </a:solidFill>
                 <a:latin typeface="Helvetica Neue"/>
               </a:defRPr>
@@ -4408,7 +4408,7 @@
               </a:spcAft>
               <a:defRPr sz="1500" b="0" i="0">
                 <a:solidFill>
-                  <a:srgbClr val="A1A1A6"/>
+                  <a:srgbClr val="6E6E73"/>
                 </a:solidFill>
                 <a:latin typeface="Helvetica Neue"/>
               </a:defRPr>
@@ -4433,7 +4433,7 @@
     <p:bg>
       <p:bgPr>
         <a:solidFill>
-          <a:srgbClr val="0B0B0C"/>
+          <a:srgbClr val="FFFFFF"/>
         </a:solidFill>
         <a:effectLst/>
       </p:bgPr>
@@ -4476,7 +4476,7 @@
               </a:spcAft>
               <a:defRPr sz="3200" b="1" i="0">
                 <a:solidFill>
-                  <a:srgbClr val="F5F5F7"/>
+                  <a:srgbClr val="000000"/>
                 </a:solidFill>
                 <a:latin typeface="Helvetica Neue"/>
               </a:defRPr>
@@ -4504,7 +4504,7 @@
             </a:avLst>
           </a:prstGeom>
           <a:solidFill>
-            <a:srgbClr val="161617"/>
+            <a:srgbClr val="F5F5F7"/>
           </a:solidFill>
           <a:ln>
             <a:noFill/>
@@ -4563,7 +4563,7 @@
               </a:spcAft>
               <a:defRPr sz="1800" b="0" i="0">
                 <a:solidFill>
-                  <a:srgbClr val="F5F5F7"/>
+                  <a:srgbClr val="000000"/>
                 </a:solidFill>
                 <a:latin typeface="Menlo"/>
               </a:defRPr>
@@ -4588,7 +4588,7 @@
     <p:bg>
       <p:bgPr>
         <a:solidFill>
-          <a:srgbClr val="0B0B0C"/>
+          <a:srgbClr val="FFFFFF"/>
         </a:solidFill>
         <a:effectLst/>
       </p:bgPr>
@@ -4631,7 +4631,7 @@
               </a:spcAft>
               <a:defRPr sz="3800" b="1" i="0">
                 <a:solidFill>
-                  <a:srgbClr val="F5F5F7"/>
+                  <a:srgbClr val="000000"/>
                 </a:solidFill>
                 <a:latin typeface="Helvetica Neue"/>
               </a:defRPr>
@@ -4692,7 +4692,7 @@
               </a:spcAft>
               <a:defRPr sz="2400" b="1" i="0">
                 <a:solidFill>
-                  <a:srgbClr val="F5F5F7"/>
+                  <a:srgbClr val="000000"/>
                 </a:solidFill>
                 <a:latin typeface="Helvetica Neue"/>
               </a:defRPr>
@@ -4711,7 +4711,7 @@
               </a:spcAft>
               <a:defRPr sz="1900" b="0" i="0">
                 <a:solidFill>
-                  <a:srgbClr val="A1A1A6"/>
+                  <a:srgbClr val="6E6E73"/>
                 </a:solidFill>
                 <a:latin typeface="Helvetica Neue"/>
               </a:defRPr>
@@ -4772,7 +4772,7 @@
               </a:spcAft>
               <a:defRPr sz="2400" b="1" i="0">
                 <a:solidFill>
-                  <a:srgbClr val="F5F5F7"/>
+                  <a:srgbClr val="000000"/>
                 </a:solidFill>
                 <a:latin typeface="Helvetica Neue"/>
               </a:defRPr>
@@ -4791,7 +4791,7 @@
               </a:spcAft>
               <a:defRPr sz="1900" b="0" i="0">
                 <a:solidFill>
-                  <a:srgbClr val="A1A1A6"/>
+                  <a:srgbClr val="6E6E73"/>
                 </a:solidFill>
                 <a:latin typeface="Helvetica Neue"/>
               </a:defRPr>
@@ -4852,7 +4852,7 @@
               </a:spcAft>
               <a:defRPr sz="2400" b="1" i="0">
                 <a:solidFill>
-                  <a:srgbClr val="F5F5F7"/>
+                  <a:srgbClr val="000000"/>
                 </a:solidFill>
                 <a:latin typeface="Helvetica Neue"/>
               </a:defRPr>
@@ -4871,7 +4871,7 @@
               </a:spcAft>
               <a:defRPr sz="1900" b="0" i="0">
                 <a:solidFill>
-                  <a:srgbClr val="A1A1A6"/>
+                  <a:srgbClr val="6E6E73"/>
                 </a:solidFill>
                 <a:latin typeface="Helvetica Neue"/>
               </a:defRPr>
@@ -4896,7 +4896,7 @@
     <p:bg>
       <p:bgPr>
         <a:solidFill>
-          <a:srgbClr val="0B0B0C"/>
+          <a:srgbClr val="FFFFFF"/>
         </a:solidFill>
         <a:effectLst/>
       </p:bgPr>
@@ -4939,7 +4939,7 @@
               </a:spcAft>
               <a:defRPr sz="7200" b="1" i="0">
                 <a:solidFill>
-                  <a:srgbClr val="F5F5F7"/>
+                  <a:srgbClr val="000000"/>
                 </a:solidFill>
                 <a:latin typeface="Helvetica Neue"/>
               </a:defRPr>
@@ -4958,7 +4958,7 @@
               </a:spcAft>
               <a:defRPr sz="2600" b="0" i="0">
                 <a:solidFill>
-                  <a:srgbClr val="A1A1A6"/>
+                  <a:srgbClr val="6E6E73"/>
                 </a:solidFill>
                 <a:latin typeface="Helvetica Neue"/>
               </a:defRPr>
@@ -4977,7 +4977,7 @@
               </a:spcAft>
               <a:defRPr sz="1800" b="0" i="0">
                 <a:solidFill>
-                  <a:srgbClr val="A1A1A6"/>
+                  <a:srgbClr val="6E6E73"/>
                 </a:solidFill>
                 <a:latin typeface="Helvetica Neue"/>
               </a:defRPr>
@@ -5002,7 +5002,7 @@
     <p:bg>
       <p:bgPr>
         <a:solidFill>
-          <a:srgbClr val="0B0B0C"/>
+          <a:srgbClr val="FFFFFF"/>
         </a:solidFill>
         <a:effectLst/>
       </p:bgPr>
@@ -5064,7 +5064,7 @@
               </a:spcAft>
               <a:defRPr sz="9600" b="1" i="0">
                 <a:solidFill>
-                  <a:srgbClr val="F5F5F7"/>
+                  <a:srgbClr val="000000"/>
                 </a:solidFill>
                 <a:latin typeface="Helvetica Neue"/>
               </a:defRPr>
@@ -5132,7 +5132,7 @@
     <p:bg>
       <p:bgPr>
         <a:solidFill>
-          <a:srgbClr val="0B0B0C"/>
+          <a:srgbClr val="FFFFFF"/>
         </a:solidFill>
         <a:effectLst/>
       </p:bgPr>
@@ -5175,7 +5175,7 @@
               </a:spcAft>
               <a:defRPr sz="5400" b="1" i="0">
                 <a:solidFill>
-                  <a:srgbClr val="F5F5F7"/>
+                  <a:srgbClr val="000000"/>
                 </a:solidFill>
                 <a:latin typeface="Helvetica Neue"/>
               </a:defRPr>
@@ -5200,7 +5200,7 @@
     <p:bg>
       <p:bgPr>
         <a:solidFill>
-          <a:srgbClr val="0B0B0C"/>
+          <a:srgbClr val="FFFFFF"/>
         </a:solidFill>
         <a:effectLst/>
       </p:bgPr>
@@ -5243,7 +5243,7 @@
               </a:spcAft>
               <a:defRPr sz="4000" b="1" i="0">
                 <a:solidFill>
-                  <a:srgbClr val="F5F5F7"/>
+                  <a:srgbClr val="000000"/>
                 </a:solidFill>
                 <a:latin typeface="Helvetica Neue"/>
               </a:defRPr>
@@ -5328,7 +5328,7 @@
               </a:spcAft>
               <a:defRPr sz="2800" b="0" i="0">
                 <a:solidFill>
-                  <a:srgbClr val="F5F5F7"/>
+                  <a:srgbClr val="000000"/>
                 </a:solidFill>
                 <a:latin typeface="Helvetica Neue"/>
               </a:defRPr>
@@ -5347,7 +5347,7 @@
               </a:spcAft>
               <a:defRPr sz="2800" b="0" i="0">
                 <a:solidFill>
-                  <a:srgbClr val="F5F5F7"/>
+                  <a:srgbClr val="000000"/>
                 </a:solidFill>
                 <a:latin typeface="Helvetica Neue"/>
               </a:defRPr>
@@ -5366,7 +5366,7 @@
               </a:spcAft>
               <a:defRPr sz="2800" b="0" i="0">
                 <a:solidFill>
-                  <a:srgbClr val="F5F5F7"/>
+                  <a:srgbClr val="000000"/>
                 </a:solidFill>
                 <a:latin typeface="Helvetica Neue"/>
               </a:defRPr>
@@ -5391,7 +5391,7 @@
     <p:bg>
       <p:bgPr>
         <a:solidFill>
-          <a:srgbClr val="0B0B0C"/>
+          <a:srgbClr val="FFFFFF"/>
         </a:solidFill>
         <a:effectLst/>
       </p:bgPr>
@@ -5434,7 +5434,7 @@
               </a:spcAft>
               <a:defRPr sz="3800" b="1" i="0">
                 <a:solidFill>
-                  <a:srgbClr val="F5F5F7"/>
+                  <a:srgbClr val="000000"/>
                 </a:solidFill>
                 <a:latin typeface="Helvetica Neue"/>
               </a:defRPr>
@@ -5462,7 +5462,7 @@
             </a:avLst>
           </a:prstGeom>
           <a:solidFill>
-            <a:srgbClr val="1D1D1F"/>
+            <a:srgbClr val="EAEAED"/>
           </a:solidFill>
           <a:ln>
             <a:noFill/>
@@ -5540,7 +5540,7 @@
               </a:spcAft>
               <a:defRPr sz="2000" b="0" i="0">
                 <a:solidFill>
-                  <a:srgbClr val="A1A1A6"/>
+                  <a:srgbClr val="6E6E73"/>
                 </a:solidFill>
                 <a:latin typeface="Helvetica Neue"/>
               </a:defRPr>
@@ -5568,7 +5568,7 @@
             </a:avLst>
           </a:prstGeom>
           <a:solidFill>
-            <a:srgbClr val="1D1D1F"/>
+            <a:srgbClr val="EAEAED"/>
           </a:solidFill>
           <a:ln>
             <a:noFill/>
@@ -5646,7 +5646,7 @@
               </a:spcAft>
               <a:defRPr sz="2000" b="0" i="0">
                 <a:solidFill>
-                  <a:srgbClr val="A1A1A6"/>
+                  <a:srgbClr val="6E6E73"/>
                 </a:solidFill>
                 <a:latin typeface="Helvetica Neue"/>
               </a:defRPr>
@@ -5671,7 +5671,7 @@
     <p:bg>
       <p:bgPr>
         <a:solidFill>
-          <a:srgbClr val="0B0B0C"/>
+          <a:srgbClr val="FFFFFF"/>
         </a:solidFill>
         <a:effectLst/>
       </p:bgPr>
@@ -5714,7 +5714,7 @@
               </a:spcAft>
               <a:defRPr sz="13000" b="1" i="0">
                 <a:solidFill>
-                  <a:srgbClr val="F5F5F7"/>
+                  <a:srgbClr val="000000"/>
                 </a:solidFill>
                 <a:latin typeface="Helvetica Neue"/>
               </a:defRPr>
@@ -5733,7 +5733,7 @@
               </a:spcAft>
               <a:defRPr sz="3000" b="0" i="0">
                 <a:solidFill>
-                  <a:srgbClr val="A1A1A6"/>
+                  <a:srgbClr val="6E6E73"/>
                 </a:solidFill>
                 <a:latin typeface="Helvetica Neue"/>
               </a:defRPr>
@@ -5758,7 +5758,7 @@
     <p:bg>
       <p:bgPr>
         <a:solidFill>
-          <a:srgbClr val="0B0B0C"/>
+          <a:srgbClr val="FFFFFF"/>
         </a:solidFill>
         <a:effectLst/>
       </p:bgPr>
@@ -5787,7 +5787,7 @@
             </a:avLst>
           </a:prstGeom>
           <a:solidFill>
-            <a:srgbClr val="161617"/>
+            <a:srgbClr val="F5F5F7"/>
           </a:solidFill>
           <a:ln>
             <a:noFill/>
@@ -5846,7 +5846,7 @@
               </a:spcAft>
               <a:defRPr sz="2400" b="0" i="0">
                 <a:solidFill>
-                  <a:srgbClr val="A1A1A6"/>
+                  <a:srgbClr val="6E6E73"/>
                 </a:solidFill>
                 <a:latin typeface="Helvetica Neue"/>
               </a:defRPr>
@@ -5888,7 +5888,7 @@
               </a:spcAft>
               <a:defRPr sz="1800" b="0" i="0">
                 <a:solidFill>
-                  <a:srgbClr val="A1A1A6"/>
+                  <a:srgbClr val="6E6E73"/>
                 </a:solidFill>
                 <a:latin typeface="Helvetica Neue"/>
               </a:defRPr>
@@ -5913,7 +5913,7 @@
     <p:bg>
       <p:bgPr>
         <a:solidFill>
-          <a:srgbClr val="0B0B0C"/>
+          <a:srgbClr val="FFFFFF"/>
         </a:solidFill>
         <a:effectLst/>
       </p:bgPr>
@@ -5956,7 +5956,7 @@
               </a:spcAft>
               <a:defRPr sz="3800" b="0" i="1">
                 <a:solidFill>
-                  <a:srgbClr val="F5F5F7"/>
+                  <a:srgbClr val="000000"/>
                 </a:solidFill>
                 <a:latin typeface="Helvetica Neue"/>
               </a:defRPr>
@@ -5975,7 +5975,7 @@
               </a:spcAft>
               <a:defRPr sz="2000" b="0" i="0">
                 <a:solidFill>
-                  <a:srgbClr val="A1A1A6"/>
+                  <a:srgbClr val="6E6E73"/>
                 </a:solidFill>
                 <a:latin typeface="Helvetica Neue"/>
               </a:defRPr>
@@ -6000,7 +6000,7 @@
     <p:bg>
       <p:bgPr>
         <a:solidFill>
-          <a:srgbClr val="0B0B0C"/>
+          <a:srgbClr val="FFFFFF"/>
         </a:solidFill>
         <a:effectLst/>
       </p:bgPr>
@@ -6043,7 +6043,7 @@
               </a:spcAft>
               <a:defRPr sz="3800" b="1" i="0">
                 <a:solidFill>
-                  <a:srgbClr val="F5F5F7"/>
+                  <a:srgbClr val="000000"/>
                 </a:solidFill>
                 <a:latin typeface="Helvetica Neue"/>
               </a:defRPr>
@@ -6071,7 +6071,7 @@
             </a:avLst>
           </a:prstGeom>
           <a:solidFill>
-            <a:srgbClr val="161617"/>
+            <a:srgbClr val="F5F5F7"/>
           </a:solidFill>
           <a:ln>
             <a:noFill/>
@@ -6130,7 +6130,7 @@
               </a:spcAft>
               <a:defRPr sz="2400" b="0" i="0">
                 <a:solidFill>
-                  <a:srgbClr val="A1A1A6"/>
+                  <a:srgbClr val="6E6E73"/>
                 </a:solidFill>
                 <a:latin typeface="Helvetica Neue"/>
               </a:defRPr>
@@ -6149,7 +6149,7 @@
               </a:spcAft>
               <a:defRPr sz="1700" b="0" i="0">
                 <a:solidFill>
-                  <a:srgbClr val="A1A1A6"/>
+                  <a:srgbClr val="6E6E73"/>
                 </a:solidFill>
                 <a:latin typeface="Helvetica Neue"/>
               </a:defRPr>
